--- a/youtube_ranking_20260511.pptx
+++ b/youtube_ranking_20260511.pptx
@@ -3478,7 +3478,7 @@
                 </a:solidFill>
                 <a:latin typeface="Arial"/>
               </a:rPr>
-              <a:t>👁 1,134,168  👍 44,918  💬 3,636</a:t>
+              <a:t>👁 1,169,378  👍 45,473  💬 3,664  📈+3.1%</a:t>
             </a:r>
           </a:p>
         </p:txBody>
@@ -3513,7 +3513,7 @@
                 </a:solidFill>
                 <a:latin typeface="Arial"/>
               </a:rPr>
-              <a:t>⏱ 1:17:28  ·  公開17時間前</a:t>
+              <a:t>⏱ 1:17:28  ·  公開18時間前</a:t>
             </a:r>
           </a:p>
         </p:txBody>
@@ -3548,7 +3548,7 @@
                 </a:solidFill>
                 <a:latin typeface="Arial"/>
               </a:rPr>
-              <a:t>💡 公開17時間で急上昇入り！　100万再生超の大ヒット　いいね率4.0%と好評価</a:t>
+              <a:t>💡 公開18時間で急上昇入り！　100万再生超の大ヒット　いいね率3.9%と好評価</a:t>
             </a:r>
           </a:p>
         </p:txBody>
@@ -3859,7 +3859,7 @@
                 </a:solidFill>
                 <a:latin typeface="Arial"/>
               </a:rPr>
-              <a:t>👁 838,209  👍 147,878  💬 11,301  ⏱ 3:09  📅 公開-6時間前</a:t>
+              <a:t>👁 1,447,141  👍 171,678  💬 12,785  ⏱ 3:09  📅 公開-5時間前</a:t>
             </a:r>
           </a:p>
         </p:txBody>
@@ -3894,7 +3894,7 @@
                 </a:solidFill>
                 <a:latin typeface="Arial"/>
               </a:rPr>
-              <a:t>💡 公開-6時間で急上昇入り！　50万再生の注目コンテンツ　いいね率17.6%と視聴者の支持が非常に高い</a:t>
+              <a:t>💡 公開-5時間で急上昇入り！　100万再生超の大ヒット　前日比+72.6%と急拡散中</a:t>
             </a:r>
           </a:p>
         </p:txBody>
@@ -4164,7 +4164,7 @@
                 </a:solidFill>
                 <a:latin typeface="Arial"/>
               </a:rPr>
-              <a:t>📺 やっさん2  👁 19,138,919  👍 158,094  ⏱ 0:10  📅 2025-08-09</a:t>
+              <a:t>📺 やっさん2  👁 19,138,956  👍 158,094  ⏱ 0:10  📅 2025-08-09</a:t>
             </a:r>
           </a:p>
         </p:txBody>
@@ -4686,7 +4686,7 @@
                 </a:solidFill>
                 <a:latin typeface="Arial"/>
               </a:rPr>
-              <a:t>📺 はるえもん  👁 11,679,620  👍 185,225  ⏱ 1:33  📅 2025-07-05</a:t>
+              <a:t>📺 はるえもん  👁 11,679,697  👍 185,225  ⏱ 1:33  📅 2025-07-05</a:t>
             </a:r>
           </a:p>
         </p:txBody>
@@ -4860,7 +4860,7 @@
                 </a:solidFill>
                 <a:latin typeface="Arial"/>
               </a:rPr>
-              <a:t>📺 やっさん2  👁 11,443,513  👍 131,990  ⏱ 0:18  📅 2025-11-01</a:t>
+              <a:t>📺 やっさん2  👁 11,443,619  👍 131,994  ⏱ 0:18  📅 2025-11-01</a:t>
             </a:r>
           </a:p>
         </p:txBody>
@@ -5130,7 +5130,7 @@
                 </a:solidFill>
                 <a:latin typeface="Arial"/>
               </a:rPr>
-              <a:t>📺 ウッドリィ  👁 24,681,901  👍 377,625  ⏱ 0:37  📅 2024-09-30</a:t>
+              <a:t>📺 ウッドリィ  👁 24,683,108  👍 377,631  ⏱ 0:37  📅 2024-09-30</a:t>
             </a:r>
           </a:p>
         </p:txBody>
@@ -5304,7 +5304,7 @@
                 </a:solidFill>
                 <a:latin typeface="Arial"/>
               </a:rPr>
-              <a:t>📺 にこみチャンネル  👁 20,444,639  👍 362,613  ⏱ 0:59  📅 2023-12-22</a:t>
+              <a:t>📺 にこみチャンネル  👁 20,444,676  👍 362,613  ⏱ 0:59  📅 2023-12-22</a:t>
             </a:r>
           </a:p>
         </p:txBody>
@@ -5478,7 +5478,7 @@
                 </a:solidFill>
                 <a:latin typeface="Arial"/>
               </a:rPr>
-              <a:t>📺 タン  👁 19,793,975  👍 389,858  ⏱ 1:00  📅 2023-09-28</a:t>
+              <a:t>📺 タン  👁 19,793,999  👍 389,860  ⏱ 1:00  📅 2023-09-28</a:t>
             </a:r>
           </a:p>
         </p:txBody>
@@ -5652,7 +5652,7 @@
                 </a:solidFill>
                 <a:latin typeface="Arial"/>
               </a:rPr>
-              <a:t>📺 ゼロ / ZERO  👁 18,635,235  👍 547,137  ⏱ 0:44  📅 2024-12-11</a:t>
+              <a:t>📺 ゼロ / ZERO  👁 18,635,285  👍 547,138  ⏱ 0:44  📅 2024-12-11</a:t>
             </a:r>
           </a:p>
         </p:txBody>
@@ -5826,7 +5826,7 @@
                 </a:solidFill>
                 <a:latin typeface="Arial"/>
               </a:rPr>
-              <a:t>📺 ぐりげんの南極第二拠点  👁 16,593,974  👍 195,541  ⏱ 1:02  📅 2025-08-18</a:t>
+              <a:t>📺 ぐりげんの南極第二拠点  👁 16,593,977  👍 195,540  ⏱ 1:02  📅 2025-08-18</a:t>
             </a:r>
           </a:p>
         </p:txBody>
@@ -6096,7 +6096,7 @@
                 </a:solidFill>
                 <a:latin typeface="Arial"/>
               </a:rPr>
-              <a:t>📺 TOHO animation チャンネル  👁 139,291,929  👍 0  ⏱ 1:31  📅 2023-07-07</a:t>
+              <a:t>📺 TOHO animation チャンネル  👁 139,296,093  👍 0  ⏱ 1:31  📅 2023-07-07</a:t>
             </a:r>
           </a:p>
         </p:txBody>
@@ -6270,7 +6270,7 @@
                 </a:solidFill>
                 <a:latin typeface="Arial"/>
               </a:rPr>
-              <a:t>📺 アニメキッズanimekids  👁 44,207,765  👍 0  ⏱ 12:11  📅 2017-11-13</a:t>
+              <a:t>📺 アニメキッズanimekids  👁 44,208,307  👍 0  ⏱ 12:11  📅 2017-11-13</a:t>
             </a:r>
           </a:p>
         </p:txBody>
@@ -6444,7 +6444,7 @@
                 </a:solidFill>
                 <a:latin typeface="Arial"/>
               </a:rPr>
-              <a:t>📺 アイナ・ジ・エンド Official  👁 42,055,424  👍 183,391  ⏱ 3:22  📅 2025-08-20</a:t>
+              <a:t>📺 アイナ・ジ・エンド Official  👁 42,060,213  👍 183,396  ⏱ 3:22  📅 2025-08-20</a:t>
             </a:r>
           </a:p>
         </p:txBody>
@@ -6618,7 +6618,7 @@
                 </a:solidFill>
                 <a:latin typeface="Arial"/>
               </a:rPr>
-              <a:t>📺 TOHO animation チャンネル  👁 33,282,544  👍 507,451  ⏱ 1:31  📅 2026-01-09</a:t>
+              <a:t>📺 TOHO animation チャンネル  👁 33,286,520  👍 507,469  ⏱ 1:31  📅 2026-01-09</a:t>
             </a:r>
           </a:p>
         </p:txBody>
@@ -6792,7 +6792,7 @@
                 </a:solidFill>
                 <a:latin typeface="Arial"/>
               </a:rPr>
-              <a:t>📺 TOHO animation チャンネル  👁 30,349,934  👍 0  ⏱ 1:31  📅 2022-09-28</a:t>
+              <a:t>📺 TOHO animation チャンネル  👁 30,350,595  👍 0  ⏱ 1:31  📅 2022-09-28</a:t>
             </a:r>
           </a:p>
         </p:txBody>
@@ -7062,7 +7062,7 @@
                 </a:solidFill>
                 <a:latin typeface="Arial"/>
               </a:rPr>
-              <a:t>📺 正直レビュー 🍰🍛  👁 6,788,710  👍 119,397  ⏱ 1:00  📅 2025-03-15</a:t>
+              <a:t>📺 正直レビュー 🍰🍛  👁 6,788,702  👍 119,397  ⏱ 1:00  📅 2025-03-15</a:t>
             </a:r>
           </a:p>
         </p:txBody>
@@ -7236,7 +7236,7 @@
                 </a:solidFill>
                 <a:latin typeface="Arial"/>
               </a:rPr>
-              <a:t>📺 KABUKU. / 市川團十郎。  👁 3,484,557  👍 45,011  ⏱ 17:48  📅 2025-07-12</a:t>
+              <a:t>📺 KABUKU. / 市川團十郎。  👁 3,484,596  👍 45,012  ⏱ 17:48  📅 2025-07-12</a:t>
             </a:r>
           </a:p>
         </p:txBody>
@@ -7410,7 +7410,7 @@
                 </a:solidFill>
                 <a:latin typeface="Arial"/>
               </a:rPr>
-              <a:t>📺 東海オンエア  👁 3,303,961  👍 29,728  ⏱ 34:45  📅 2024-09-26</a:t>
+              <a:t>📺 東海オンエア  👁 3,304,087  👍 29,728  ⏱ 34:45  📅 2024-09-26</a:t>
             </a:r>
           </a:p>
         </p:txBody>
@@ -7584,7 +7584,7 @@
                 </a:solidFill>
                 <a:latin typeface="Arial"/>
               </a:rPr>
-              <a:t>📺 ホッカイロレン  👁 3,254,179  👍 43,104  ⏱ 12:56  📅 2023-12-19</a:t>
+              <a:t>📺 ホッカイロレン  👁 3,254,247  👍 43,104  ⏱ 12:56  📅 2023-12-19</a:t>
             </a:r>
           </a:p>
         </p:txBody>
@@ -7758,7 +7758,7 @@
                 </a:solidFill>
                 <a:latin typeface="Arial"/>
               </a:rPr>
-              <a:t>📺 2ch有益プラネット【ゆっくり解説】  👁 2,942,224  👍 35,178  ⏱ 0:59  📅 2023-10-19</a:t>
+              <a:t>📺 2ch有益プラネット【ゆっくり解説】  👁 2,942,319  👍 35,179  ⏱ 0:59  📅 2023-10-19</a:t>
             </a:r>
           </a:p>
         </p:txBody>
@@ -7983,7 +7983,7 @@
                 </a:solidFill>
                 <a:latin typeface="Arial"/>
               </a:rPr>
-              <a:t>👁 46,363  👍 1,827  💬 350</a:t>
+              <a:t>👁 61,655  👍 2,168  💬 412  📈+33.0%</a:t>
             </a:r>
           </a:p>
         </p:txBody>
@@ -8018,7 +8018,7 @@
                 </a:solidFill>
                 <a:latin typeface="Arial"/>
               </a:rPr>
-              <a:t>⏱ 1:20:16  ·  公開-6時間前</a:t>
+              <a:t>⏱ 1:20:16  ·  公開-5時間前</a:t>
             </a:r>
           </a:p>
         </p:txBody>
@@ -8053,7 +8053,7 @@
                 </a:solidFill>
                 <a:latin typeface="Arial"/>
               </a:rPr>
-              <a:t>💡 公開-6時間で急上昇入り！　急上昇中の新興コンテンツ　いいね率3.9%と好評価</a:t>
+              <a:t>💡 公開-5時間で急上昇入り！　急上昇中の新興コンテンツ　前日比+33.0%で着実に成長</a:t>
             </a:r>
           </a:p>
         </p:txBody>
@@ -8313,7 +8313,7 @@
                 </a:solidFill>
                 <a:latin typeface="Arial"/>
               </a:rPr>
-              <a:t>👁 34,619  👍 2,646  💬 0</a:t>
+              <a:t>👁 36,726  👍 2,838  💬 0  📈+6.1%</a:t>
             </a:r>
           </a:p>
         </p:txBody>
@@ -8348,7 +8348,7 @@
                 </a:solidFill>
                 <a:latin typeface="Arial"/>
               </a:rPr>
-              <a:t>⏱ 3:33  ·  公開11時間前</a:t>
+              <a:t>⏱ 3:33  ·  公開12時間前</a:t>
             </a:r>
           </a:p>
         </p:txBody>
@@ -8383,7 +8383,7 @@
                 </a:solidFill>
                 <a:latin typeface="Arial"/>
               </a:rPr>
-              <a:t>💡 公開11時間で急上昇入り！　急上昇中の新興コンテンツ　いいね率7.6%と視聴者の支持が非常に高い</a:t>
+              <a:t>💡 公開12時間で急上昇入り！　急上昇中の新興コンテンツ　いいね率7.7%と視聴者の支持が非常に高い</a:t>
             </a:r>
           </a:p>
         </p:txBody>
@@ -8643,7 +8643,7 @@
                 </a:solidFill>
                 <a:latin typeface="Arial"/>
               </a:rPr>
-              <a:t>👁 81,739  👍 4,668  💬 157</a:t>
+              <a:t>👁 109,014  👍 5,560  💬 180  📈+33.4%</a:t>
             </a:r>
           </a:p>
         </p:txBody>
@@ -8678,7 +8678,7 @@
                 </a:solidFill>
                 <a:latin typeface="Arial"/>
               </a:rPr>
-              <a:t>⏱ 34:49  ·  公開-6時間前</a:t>
+              <a:t>⏱ 34:49  ·  公開-5時間前</a:t>
             </a:r>
           </a:p>
         </p:txBody>
@@ -8713,7 +8713,7 @@
                 </a:solidFill>
                 <a:latin typeface="Arial"/>
               </a:rPr>
-              <a:t>💡 公開-6時間で急上昇入り！　急上昇中の新興コンテンツ　いいね率5.7%と視聴者の支持が非常に高い</a:t>
+              <a:t>💡 公開-5時間で急上昇入り！　10万再生突破の話題作　前日比+33.4%で着実に成長</a:t>
             </a:r>
           </a:p>
         </p:txBody>
@@ -8903,7 +8903,7 @@
                 </a:solidFill>
                 <a:latin typeface="Arial"/>
               </a:rPr>
-              <a:t>ガチ夢中！</a:t>
+              <a:t>NMIXX(엔믹스) “Heavy Serenade” M/V</a:t>
             </a:r>
           </a:p>
         </p:txBody>
@@ -8938,7 +8938,7 @@
                 </a:solidFill>
                 <a:latin typeface="Arial"/>
               </a:rPr>
-              <a:t>📺  chotokkyu - Topic</a:t>
+              <a:t>📺  JYP Entertainment</a:t>
             </a:r>
           </a:p>
         </p:txBody>
@@ -8973,7 +8973,7 @@
                 </a:solidFill>
                 <a:latin typeface="Arial"/>
               </a:rPr>
-              <a:t>👁 61,052  👍 4,968  💬 269</a:t>
+              <a:t>👁 365,604  👍 76,781  💬 7,127  📈+41.0%</a:t>
             </a:r>
           </a:p>
         </p:txBody>
@@ -9008,7 +9008,7 @@
                 </a:solidFill>
                 <a:latin typeface="Arial"/>
               </a:rPr>
-              <a:t>⏱ 3:49  ·  公開16時間前</a:t>
+              <a:t>⏱ 3:32  ·  公開-5時間前</a:t>
             </a:r>
           </a:p>
         </p:txBody>
@@ -9043,7 +9043,7 @@
                 </a:solidFill>
                 <a:latin typeface="Arial"/>
               </a:rPr>
-              <a:t>💡 公開16時間で急上昇入り！　急上昇中の新興コンテンツ　いいね率8.1%と視聴者の支持が非常に高い</a:t>
+              <a:t>💡 公開-5時間で急上昇入り！　10万再生突破の話題作　前日比+41.0%で着実に成長</a:t>
             </a:r>
           </a:p>
         </p:txBody>
@@ -9078,7 +9078,7 @@
                 </a:solidFill>
                 <a:latin typeface="Arial"/>
               </a:rPr>
-              <a:t>https://www.youtube.com/watch?v=FH1cgh2l9fw</a:t>
+              <a:t>https://www.youtube.com/watch?v=6Ycn9qZK09I</a:t>
             </a:r>
           </a:p>
         </p:txBody>
@@ -9303,7 +9303,7 @@
                 </a:solidFill>
                 <a:latin typeface="Arial"/>
               </a:rPr>
-              <a:t>👁 137,985  👍 4,529  💬 649</a:t>
+              <a:t>👁 156,493  👍 4,816  💬 677  📈+13.4%</a:t>
             </a:r>
           </a:p>
         </p:txBody>
@@ -9373,7 +9373,7 @@
                 </a:solidFill>
                 <a:latin typeface="Arial"/>
               </a:rPr>
-              <a:t>💡 公開0時間で急上昇入り！　10万再生突破の話題作　いいね率3.3%と好評価</a:t>
+              <a:t>💡 公開0時間で急上昇入り！　10万再生突破の話題作　前日比+13.4%で着実に成長</a:t>
             </a:r>
           </a:p>
         </p:txBody>
@@ -9563,7 +9563,7 @@
                 </a:solidFill>
                 <a:latin typeface="Arial"/>
               </a:rPr>
-              <a:t>NMIXX(엔믹스) “Heavy Serenade” M/V</a:t>
+              <a:t>BOYNEXTDOOR (보이넥스트도어) '똑똑똑' Official MV</a:t>
             </a:r>
           </a:p>
         </p:txBody>
@@ -9598,7 +9598,7 @@
                 </a:solidFill>
                 <a:latin typeface="Arial"/>
               </a:rPr>
-              <a:t>📺  JYP Entertainment</a:t>
+              <a:t>📺  HYBE LABELS</a:t>
             </a:r>
           </a:p>
         </p:txBody>
@@ -9633,7 +9633,7 @@
                 </a:solidFill>
                 <a:latin typeface="Arial"/>
               </a:rPr>
-              <a:t>👁 259,218  👍 67,289  💬 6,594</a:t>
+              <a:t>👁 1,739,287  👍 144,205  💬 12,651  📈+5.5%</a:t>
             </a:r>
           </a:p>
         </p:txBody>
@@ -9668,7 +9668,7 @@
                 </a:solidFill>
                 <a:latin typeface="Arial"/>
               </a:rPr>
-              <a:t>⏱ 3:32  ·  公開-6時間前</a:t>
+              <a:t>⏱ 2:47  ·  公開12時間前</a:t>
             </a:r>
           </a:p>
         </p:txBody>
@@ -9703,7 +9703,7 @@
                 </a:solidFill>
                 <a:latin typeface="Arial"/>
               </a:rPr>
-              <a:t>💡 公開-6時間で急上昇入り！　10万再生突破の話題作　いいね率26.0%と視聴者の支持が非常に高い</a:t>
+              <a:t>💡 公開12時間で急上昇入り！　100万再生超の大ヒット　いいね率8.3%と視聴者の支持が非常に高い</a:t>
             </a:r>
           </a:p>
         </p:txBody>
@@ -9738,7 +9738,7 @@
                 </a:solidFill>
                 <a:latin typeface="Arial"/>
               </a:rPr>
-              <a:t>https://www.youtube.com/watch?v=6Ycn9qZK09I</a:t>
+              <a:t>https://www.youtube.com/watch?v=WxGWMI2B7r8</a:t>
             </a:r>
           </a:p>
         </p:txBody>
@@ -9963,7 +9963,7 @@
                 </a:solidFill>
                 <a:latin typeface="Arial"/>
               </a:rPr>
-              <a:t>👁 161,918  👍 1,562  💬 446</a:t>
+              <a:t>👁 177,050  👍 1,611  💬 457  📈+9.3%</a:t>
             </a:r>
           </a:p>
         </p:txBody>
@@ -10223,7 +10223,7 @@
                 </a:solidFill>
                 <a:latin typeface="Arial"/>
               </a:rPr>
-              <a:t>BOYNEXTDOOR (보이넥스트도어) '똑똑똑' Official MV</a:t>
+              <a:t>超特急「ガチ夢中！」MUSIC VIDEO</a:t>
             </a:r>
           </a:p>
         </p:txBody>
@@ -10258,7 +10258,7 @@
                 </a:solidFill>
                 <a:latin typeface="Arial"/>
               </a:rPr>
-              <a:t>📺  HYBE LABELS</a:t>
+              <a:t>📺  超特急</a:t>
             </a:r>
           </a:p>
         </p:txBody>
@@ -10293,7 +10293,7 @@
                 </a:solidFill>
                 <a:latin typeface="Arial"/>
               </a:rPr>
-              <a:t>👁 1,649,069  👍 142,132  💬 12,565</a:t>
+              <a:t>👁 5,210  👍 18,746  💬 2,064</a:t>
             </a:r>
           </a:p>
         </p:txBody>
@@ -10328,7 +10328,7 @@
                 </a:solidFill>
                 <a:latin typeface="Arial"/>
               </a:rPr>
-              <a:t>⏱ 2:47  ·  公開11時間前</a:t>
+              <a:t>⏱ 4:26  ·  公開-7時間前</a:t>
             </a:r>
           </a:p>
         </p:txBody>
@@ -10363,7 +10363,7 @@
                 </a:solidFill>
                 <a:latin typeface="Arial"/>
               </a:rPr>
-              <a:t>💡 公開11時間で急上昇入り！　100万再生超の大ヒット　いいね率8.6%と視聴者の支持が非常に高い</a:t>
+              <a:t>💡 公開-7時間で急上昇入り！　急上昇中の新興コンテンツ　いいね率359.8%と視聴者の支持が非常に高い</a:t>
             </a:r>
           </a:p>
         </p:txBody>
@@ -10398,7 +10398,7 @@
                 </a:solidFill>
                 <a:latin typeface="Arial"/>
               </a:rPr>
-              <a:t>https://www.youtube.com/watch?v=WxGWMI2B7r8</a:t>
+              <a:t>https://www.youtube.com/watch?v=0beWrfj7AvE</a:t>
             </a:r>
           </a:p>
         </p:txBody>
